--- a/slidesforpre/260508-WP2-6.pptx
+++ b/slidesforpre/260508-WP2-6.pptx
@@ -119,11 +119,11 @@
         <p14:section name="默认节" id="{4C40F828-09B2-4C93-8F08-4594321A6912}">
           <p14:sldIdLst>
             <p14:sldId id="256"/>
+            <p14:sldId id="293"/>
+            <p14:sldId id="297"/>
             <p14:sldId id="292"/>
             <p14:sldId id="294"/>
             <p14:sldId id="289"/>
-            <p14:sldId id="293"/>
-            <p14:sldId id="297"/>
           </p14:sldIdLst>
         </p14:section>
       </p14:sectionLst>
@@ -10922,7 +10922,7 @@
         </p:nvSpPr>
         <p:spPr>
           <a:xfrm>
-            <a:off x="266699" y="110232"/>
+            <a:off x="266699" y="103247"/>
             <a:ext cx="8032173" cy="593725"/>
           </a:xfrm>
         </p:spPr>
@@ -14364,6 +14364,278 @@
           </a:fontRef>
         </p:style>
       </p:cxnSp>
+      <p:sp>
+        <p:nvSpPr>
+          <p:cNvPr id="20" name="矩形: 圆角 120"/>
+          <p:cNvSpPr/>
+          <p:nvPr/>
+        </p:nvSpPr>
+        <p:spPr>
+          <a:xfrm>
+            <a:off x="5399405" y="329565"/>
+            <a:ext cx="1264920" cy="301625"/>
+          </a:xfrm>
+          <a:prstGeom prst="roundRect">
+            <a:avLst/>
+          </a:prstGeom>
+          <a:solidFill>
+            <a:srgbClr val="0707EC"/>
+          </a:solidFill>
+        </p:spPr>
+        <p:style>
+          <a:lnRef idx="2">
+            <a:schemeClr val="accent1">
+              <a:shade val="15000"/>
+            </a:schemeClr>
+          </a:lnRef>
+          <a:fillRef idx="1">
+            <a:schemeClr val="accent1"/>
+          </a:fillRef>
+          <a:effectRef idx="0">
+            <a:schemeClr val="accent1"/>
+          </a:effectRef>
+          <a:fontRef idx="minor">
+            <a:schemeClr val="lt1"/>
+          </a:fontRef>
+        </p:style>
+        <p:txBody>
+          <a:bodyPr rtlCol="0" anchor="ctr"/>
+          <a:p>
+            <a:pPr algn="ctr"/>
+            <a:r>
+              <a:rPr lang="en-US" altLang="zh-CN" sz="1600" b="1" dirty="0">
+                <a:latin typeface="Times New Roman" panose="02020603050405020304" pitchFamily="18" charset="0"/>
+                <a:cs typeface="Times New Roman" panose="02020603050405020304" pitchFamily="18" charset="0"/>
+              </a:rPr>
+              <a:t>Long track</a:t>
+            </a:r>
+            <a:endParaRPr lang="en-US" altLang="zh-CN" sz="1600" b="1" dirty="0">
+              <a:latin typeface="Times New Roman" panose="02020603050405020304" pitchFamily="18" charset="0"/>
+              <a:cs typeface="Times New Roman" panose="02020603050405020304" pitchFamily="18" charset="0"/>
+            </a:endParaRPr>
+          </a:p>
+        </p:txBody>
+      </p:sp>
+      <p:cxnSp>
+        <p:nvCxnSpPr>
+          <p:cNvPr id="22" name="Straight Arrow Connector 21"/>
+          <p:cNvCxnSpPr/>
+          <p:nvPr/>
+        </p:nvCxnSpPr>
+        <p:spPr>
+          <a:xfrm flipH="1" flipV="1">
+            <a:off x="6040120" y="631190"/>
+            <a:ext cx="186055" cy="1720215"/>
+          </a:xfrm>
+          <a:prstGeom prst="straightConnector1">
+            <a:avLst/>
+          </a:prstGeom>
+          <a:ln w="28575" cmpd="sng">
+            <a:solidFill>
+              <a:schemeClr val="tx1"/>
+            </a:solidFill>
+            <a:prstDash val="sysDot"/>
+            <a:tailEnd type="arrow" w="med" len="med"/>
+          </a:ln>
+        </p:spPr>
+        <p:style>
+          <a:lnRef idx="3">
+            <a:schemeClr val="dk1"/>
+          </a:lnRef>
+          <a:fillRef idx="0">
+            <a:schemeClr val="dk1"/>
+          </a:fillRef>
+          <a:effectRef idx="2">
+            <a:schemeClr val="dk1"/>
+          </a:effectRef>
+          <a:fontRef idx="minor">
+            <a:schemeClr val="tx1"/>
+          </a:fontRef>
+        </p:style>
+      </p:cxnSp>
+      <p:sp>
+        <p:nvSpPr>
+          <p:cNvPr id="23" name="矩形: 圆角 120"/>
+          <p:cNvSpPr/>
+          <p:nvPr/>
+        </p:nvSpPr>
+        <p:spPr>
+          <a:xfrm>
+            <a:off x="5911850" y="5100320"/>
+            <a:ext cx="1930400" cy="301625"/>
+          </a:xfrm>
+          <a:prstGeom prst="roundRect">
+            <a:avLst/>
+          </a:prstGeom>
+          <a:solidFill>
+            <a:srgbClr val="0707EC"/>
+          </a:solidFill>
+        </p:spPr>
+        <p:style>
+          <a:lnRef idx="2">
+            <a:schemeClr val="accent1">
+              <a:shade val="15000"/>
+            </a:schemeClr>
+          </a:lnRef>
+          <a:fillRef idx="1">
+            <a:schemeClr val="accent1"/>
+          </a:fillRef>
+          <a:effectRef idx="0">
+            <a:schemeClr val="accent1"/>
+          </a:effectRef>
+          <a:fontRef idx="minor">
+            <a:schemeClr val="lt1"/>
+          </a:fontRef>
+        </p:style>
+        <p:txBody>
+          <a:bodyPr rtlCol="0" anchor="ctr"/>
+          <a:p>
+            <a:pPr algn="ctr"/>
+            <a:r>
+              <a:rPr lang="en-US" altLang="zh-CN" sz="1600" b="1" dirty="0">
+                <a:latin typeface="Times New Roman" panose="02020603050405020304" pitchFamily="18" charset="0"/>
+                <a:cs typeface="Times New Roman" panose="02020603050405020304" pitchFamily="18" charset="0"/>
+              </a:rPr>
+              <a:t>Downstream track</a:t>
+            </a:r>
+            <a:endParaRPr lang="en-US" altLang="zh-CN" sz="1600" b="1" dirty="0">
+              <a:latin typeface="Times New Roman" panose="02020603050405020304" pitchFamily="18" charset="0"/>
+              <a:cs typeface="Times New Roman" panose="02020603050405020304" pitchFamily="18" charset="0"/>
+            </a:endParaRPr>
+          </a:p>
+        </p:txBody>
+      </p:sp>
+      <p:cxnSp>
+        <p:nvCxnSpPr>
+          <p:cNvPr id="24" name="Straight Arrow Connector 23"/>
+          <p:cNvCxnSpPr>
+            <a:stCxn id="38" idx="5"/>
+            <a:endCxn id="23" idx="0"/>
+          </p:cNvCxnSpPr>
+          <p:nvPr/>
+        </p:nvCxnSpPr>
+        <p:spPr>
+          <a:xfrm>
+            <a:off x="6558915" y="4476750"/>
+            <a:ext cx="318135" cy="623570"/>
+          </a:xfrm>
+          <a:prstGeom prst="straightConnector1">
+            <a:avLst/>
+          </a:prstGeom>
+          <a:ln w="28575" cmpd="sng">
+            <a:solidFill>
+              <a:schemeClr val="tx1"/>
+            </a:solidFill>
+            <a:prstDash val="sysDot"/>
+            <a:tailEnd type="arrow" w="med" len="med"/>
+          </a:ln>
+        </p:spPr>
+        <p:style>
+          <a:lnRef idx="3">
+            <a:schemeClr val="dk1"/>
+          </a:lnRef>
+          <a:fillRef idx="0">
+            <a:schemeClr val="dk1"/>
+          </a:fillRef>
+          <a:effectRef idx="2">
+            <a:schemeClr val="dk1"/>
+          </a:effectRef>
+          <a:fontRef idx="minor">
+            <a:schemeClr val="tx1"/>
+          </a:fontRef>
+        </p:style>
+      </p:cxnSp>
+      <p:sp>
+        <p:nvSpPr>
+          <p:cNvPr id="25" name="矩形: 圆角 120"/>
+          <p:cNvSpPr/>
+          <p:nvPr/>
+        </p:nvSpPr>
+        <p:spPr>
+          <a:xfrm>
+            <a:off x="2127885" y="5401945"/>
+            <a:ext cx="1930400" cy="301625"/>
+          </a:xfrm>
+          <a:prstGeom prst="roundRect">
+            <a:avLst/>
+          </a:prstGeom>
+          <a:solidFill>
+            <a:srgbClr val="0707EC"/>
+          </a:solidFill>
+        </p:spPr>
+        <p:style>
+          <a:lnRef idx="2">
+            <a:schemeClr val="accent1">
+              <a:shade val="15000"/>
+            </a:schemeClr>
+          </a:lnRef>
+          <a:fillRef idx="1">
+            <a:schemeClr val="accent1"/>
+          </a:fillRef>
+          <a:effectRef idx="0">
+            <a:schemeClr val="accent1"/>
+          </a:effectRef>
+          <a:fontRef idx="minor">
+            <a:schemeClr val="lt1"/>
+          </a:fontRef>
+        </p:style>
+        <p:txBody>
+          <a:bodyPr rtlCol="0" anchor="ctr"/>
+          <a:p>
+            <a:pPr algn="ctr"/>
+            <a:r>
+              <a:rPr lang="en-US" altLang="zh-CN" sz="1600" b="1" dirty="0">
+                <a:latin typeface="Times New Roman" panose="02020603050405020304" pitchFamily="18" charset="0"/>
+                <a:cs typeface="Times New Roman" panose="02020603050405020304" pitchFamily="18" charset="0"/>
+              </a:rPr>
+              <a:t>Upstream track</a:t>
+            </a:r>
+            <a:endParaRPr lang="en-US" altLang="zh-CN" sz="1600" b="1" dirty="0">
+              <a:latin typeface="Times New Roman" panose="02020603050405020304" pitchFamily="18" charset="0"/>
+              <a:cs typeface="Times New Roman" panose="02020603050405020304" pitchFamily="18" charset="0"/>
+            </a:endParaRPr>
+          </a:p>
+        </p:txBody>
+      </p:sp>
+      <p:cxnSp>
+        <p:nvCxnSpPr>
+          <p:cNvPr id="26" name="Straight Arrow Connector 25"/>
+          <p:cNvCxnSpPr>
+            <a:endCxn id="25" idx="0"/>
+          </p:cNvCxnSpPr>
+          <p:nvPr/>
+        </p:nvCxnSpPr>
+        <p:spPr>
+          <a:xfrm flipH="1">
+            <a:off x="3093085" y="4077335"/>
+            <a:ext cx="504825" cy="1324610"/>
+          </a:xfrm>
+          <a:prstGeom prst="straightConnector1">
+            <a:avLst/>
+          </a:prstGeom>
+          <a:ln w="28575" cmpd="sng">
+            <a:solidFill>
+              <a:schemeClr val="tx1"/>
+            </a:solidFill>
+            <a:prstDash val="sysDot"/>
+            <a:tailEnd type="arrow" w="med" len="med"/>
+          </a:ln>
+        </p:spPr>
+        <p:style>
+          <a:lnRef idx="3">
+            <a:schemeClr val="dk1"/>
+          </a:lnRef>
+          <a:fillRef idx="0">
+            <a:schemeClr val="dk1"/>
+          </a:fillRef>
+          <a:effectRef idx="2">
+            <a:schemeClr val="dk1"/>
+          </a:effectRef>
+          <a:fontRef idx="minor">
+            <a:schemeClr val="tx1"/>
+          </a:fontRef>
+        </p:style>
+      </p:cxnSp>
     </p:spTree>
   </p:cSld>
   <p:clrMapOvr>
